--- a/docs/系统UI设计稿.pptx
+++ b/docs/系统UI设计稿.pptx
@@ -14,6 +14,7 @@
     <p:sldId id="262" r:id="rId13"/>
     <p:sldId id="263" r:id="rId14"/>
     <p:sldId id="264" r:id="rId15"/>
+    <p:sldId id="266" r:id="rId17"/>
     <p:sldId id="265" r:id="rId16"/>
   </p:sldIdLst>
   <p:sldSz cx="12191695" cy="6858000" type="screen4x3"/>
@@ -3240,7 +3241,7 @@
               </a:defRPr>
             </a:pPr>
             <a:r>
-              <a:t>版本 v1.0 | 2026年10月10日 | 前端：曹渲东、王英杰</a:t>
+              <a:t>版本 v1.1 | 2026年10月13日 | 前端：曹渲东、王英杰</a:t>
             </a:r>
           </a:p>
         </p:txBody>
@@ -3399,6 +3400,1939 @@
 </p:sld>
 </file>
 
+<file path=ppt/slides/slide11.xml><?xml version="1.0" encoding="utf-8"?>
+<p:sld xmlns:a="http://schemas.openxmlformats.org/drawingml/2006/main" xmlns:p="http://schemas.openxmlformats.org/presentationml/2006/main" xmlns:r="http://schemas.openxmlformats.org/officeDocument/2006/relationships">
+  <p:cSld>
+    <p:bg>
+      <p:bgPr>
+        <a:solidFill>
+          <a:srgbClr val="F5F7FA"/>
+        </a:solidFill>
+        <a:effectLst/>
+      </p:bgPr>
+    </p:bg>
+    <p:spTree>
+      <p:nvGrpSpPr>
+        <p:cNvPr id="1" name=""/>
+        <p:cNvGrpSpPr/>
+        <p:nvPr/>
+      </p:nvGrpSpPr>
+      <p:grpSpPr/>
+      <p:sp>
+        <p:nvSpPr>
+          <p:cNvPr id="2" name="Rounded Rectangle 1"/>
+          <p:cNvSpPr/>
+          <p:nvPr/>
+        </p:nvSpPr>
+        <p:spPr>
+          <a:xfrm>
+            <a:off x="0" y="0"/>
+            <a:ext cx="12191695" cy="731520"/>
+          </a:xfrm>
+          <a:prstGeom prst="roundRect">
+            <a:avLst/>
+          </a:prstGeom>
+          <a:solidFill>
+            <a:srgbClr val="2F5496"/>
+          </a:solidFill>
+          <a:ln w="12700">
+            <a:solidFill>
+              <a:srgbClr val="2F5496"/>
+            </a:solidFill>
+          </a:ln>
+          <a:effectLst/>
+        </p:spPr>
+        <p:style>
+          <a:lnRef idx="1">
+            <a:schemeClr val="accent1"/>
+          </a:lnRef>
+          <a:fillRef idx="3">
+            <a:schemeClr val="accent1"/>
+          </a:fillRef>
+          <a:effectRef idx="2">
+            <a:schemeClr val="accent1"/>
+          </a:effectRef>
+          <a:fontRef idx="minor">
+            <a:schemeClr val="lt1"/>
+          </a:fontRef>
+        </p:style>
+        <p:txBody>
+          <a:bodyPr rtlCol="0" anchor="ctr"/>
+          <a:lstStyle/>
+          <a:p>
+            <a:pPr algn="ctr"/>
+          </a:p>
+        </p:txBody>
+      </p:sp>
+      <p:sp>
+        <p:nvSpPr>
+          <p:cNvPr id="3" name="TextBox 2"/>
+          <p:cNvSpPr txBox="1"/>
+          <p:nvPr/>
+        </p:nvSpPr>
+        <p:spPr>
+          <a:xfrm>
+            <a:off x="457200" y="137160"/>
+            <a:ext cx="8229600" cy="457200"/>
+          </a:xfrm>
+          <a:prstGeom prst="rect">
+            <a:avLst/>
+          </a:prstGeom>
+          <a:noFill/>
+        </p:spPr>
+        <p:txBody>
+          <a:bodyPr wrap="square">
+            <a:spAutoFit/>
+          </a:bodyPr>
+          <a:lstStyle/>
+          <a:p>
+            <a:pPr algn="l">
+              <a:defRPr sz="2000" b="1">
+                <a:solidFill>
+                  <a:srgbClr val="FFFFFF"/>
+                </a:solidFill>
+              </a:defRPr>
+            </a:pPr>
+            <a:r>
+              <a:t>实现进度对照 / Implementation Status</a:t>
+            </a:r>
+          </a:p>
+        </p:txBody>
+      </p:sp>
+      <p:sp>
+        <p:nvSpPr>
+          <p:cNvPr id="4" name="TextBox 3"/>
+          <p:cNvSpPr txBox="1"/>
+          <p:nvPr/>
+        </p:nvSpPr>
+        <p:spPr>
+          <a:xfrm>
+            <a:off x="457200" y="6309360"/>
+            <a:ext cx="10972800" cy="365760"/>
+          </a:xfrm>
+          <a:prstGeom prst="rect">
+            <a:avLst/>
+          </a:prstGeom>
+          <a:noFill/>
+        </p:spPr>
+        <p:txBody>
+          <a:bodyPr wrap="square">
+            <a:spAutoFit/>
+          </a:bodyPr>
+          <a:lstStyle/>
+          <a:p>
+            <a:pPr algn="l">
+              <a:defRPr sz="900" b="0">
+                <a:solidFill>
+                  <a:srgbClr val="9CA3AF"/>
+                </a:solidFill>
+              </a:defRPr>
+            </a:pPr>
+            <a:r>
+              <a:t>AI+题库智能教学平台 | UI设计稿 v1.1 | 2026.10</a:t>
+            </a:r>
+          </a:p>
+        </p:txBody>
+      </p:sp>
+      <p:sp>
+        <p:nvSpPr>
+          <p:cNvPr id="5" name="TextBox 4"/>
+          <p:cNvSpPr txBox="1"/>
+          <p:nvPr/>
+        </p:nvSpPr>
+        <p:spPr>
+          <a:xfrm>
+            <a:off x="457200" y="914400"/>
+            <a:ext cx="10972800" cy="274320"/>
+          </a:xfrm>
+          <a:prstGeom prst="rect">
+            <a:avLst/>
+          </a:prstGeom>
+          <a:noFill/>
+        </p:spPr>
+        <p:txBody>
+          <a:bodyPr wrap="square">
+            <a:spAutoFit/>
+          </a:bodyPr>
+          <a:lstStyle/>
+          <a:p>
+            <a:pPr algn="l">
+              <a:defRPr sz="1200" b="0">
+                <a:solidFill>
+                  <a:srgbClr val="9CA3AF"/>
+                </a:solidFill>
+              </a:defRPr>
+            </a:pPr>
+            <a:r>
+              <a:t>设计稿页面与当前代码实现（main 分支，2026-10-13）对照</a:t>
+            </a:r>
+          </a:p>
+        </p:txBody>
+      </p:sp>
+      <p:sp>
+        <p:nvSpPr>
+          <p:cNvPr id="6" name="Rounded Rectangle 5"/>
+          <p:cNvSpPr/>
+          <p:nvPr/>
+        </p:nvSpPr>
+        <p:spPr>
+          <a:xfrm>
+            <a:off x="457200" y="1371600"/>
+            <a:ext cx="2377440" cy="475488"/>
+          </a:xfrm>
+          <a:prstGeom prst="roundRect">
+            <a:avLst/>
+          </a:prstGeom>
+          <a:solidFill>
+            <a:srgbClr val="EEF2FF"/>
+          </a:solidFill>
+          <a:ln w="12700">
+            <a:solidFill>
+              <a:srgbClr val="D1D5DB"/>
+            </a:solidFill>
+          </a:ln>
+          <a:effectLst/>
+        </p:spPr>
+        <p:style>
+          <a:lnRef idx="1">
+            <a:schemeClr val="accent1"/>
+          </a:lnRef>
+          <a:fillRef idx="3">
+            <a:schemeClr val="accent1"/>
+          </a:fillRef>
+          <a:effectRef idx="2">
+            <a:schemeClr val="accent1"/>
+          </a:effectRef>
+          <a:fontRef idx="minor">
+            <a:schemeClr val="lt1"/>
+          </a:fontRef>
+        </p:style>
+        <p:txBody>
+          <a:bodyPr rtlCol="0" anchor="ctr"/>
+          <a:lstStyle/>
+          <a:p>
+            <a:pPr algn="ctr"/>
+          </a:p>
+        </p:txBody>
+      </p:sp>
+      <p:sp>
+        <p:nvSpPr>
+          <p:cNvPr id="7" name="TextBox 6"/>
+          <p:cNvSpPr txBox="1"/>
+          <p:nvPr/>
+        </p:nvSpPr>
+        <p:spPr>
+          <a:xfrm>
+            <a:off x="566928" y="1463040"/>
+            <a:ext cx="2157984" cy="329184"/>
+          </a:xfrm>
+          <a:prstGeom prst="rect">
+            <a:avLst/>
+          </a:prstGeom>
+          <a:noFill/>
+        </p:spPr>
+        <p:txBody>
+          <a:bodyPr wrap="square">
+            <a:spAutoFit/>
+          </a:bodyPr>
+          <a:lstStyle/>
+          <a:p>
+            <a:pPr algn="l">
+              <a:defRPr sz="1200" b="1">
+                <a:solidFill>
+                  <a:srgbClr val="2F5496"/>
+                </a:solidFill>
+              </a:defRPr>
+            </a:pPr>
+            <a:r>
+              <a:t>页面/模块</a:t>
+            </a:r>
+          </a:p>
+        </p:txBody>
+      </p:sp>
+      <p:sp>
+        <p:nvSpPr>
+          <p:cNvPr id="8" name="Rounded Rectangle 7"/>
+          <p:cNvSpPr/>
+          <p:nvPr/>
+        </p:nvSpPr>
+        <p:spPr>
+          <a:xfrm>
+            <a:off x="2834640" y="1371600"/>
+            <a:ext cx="1005840" cy="475488"/>
+          </a:xfrm>
+          <a:prstGeom prst="roundRect">
+            <a:avLst/>
+          </a:prstGeom>
+          <a:solidFill>
+            <a:srgbClr val="EEF2FF"/>
+          </a:solidFill>
+          <a:ln w="12700">
+            <a:solidFill>
+              <a:srgbClr val="D1D5DB"/>
+            </a:solidFill>
+          </a:ln>
+          <a:effectLst/>
+        </p:spPr>
+        <p:style>
+          <a:lnRef idx="1">
+            <a:schemeClr val="accent1"/>
+          </a:lnRef>
+          <a:fillRef idx="3">
+            <a:schemeClr val="accent1"/>
+          </a:fillRef>
+          <a:effectRef idx="2">
+            <a:schemeClr val="accent1"/>
+          </a:effectRef>
+          <a:fontRef idx="minor">
+            <a:schemeClr val="lt1"/>
+          </a:fontRef>
+        </p:style>
+        <p:txBody>
+          <a:bodyPr rtlCol="0" anchor="ctr"/>
+          <a:lstStyle/>
+          <a:p>
+            <a:pPr algn="ctr"/>
+          </a:p>
+        </p:txBody>
+      </p:sp>
+      <p:sp>
+        <p:nvSpPr>
+          <p:cNvPr id="9" name="TextBox 8"/>
+          <p:cNvSpPr txBox="1"/>
+          <p:nvPr/>
+        </p:nvSpPr>
+        <p:spPr>
+          <a:xfrm>
+            <a:off x="2944368" y="1463040"/>
+            <a:ext cx="786384" cy="329184"/>
+          </a:xfrm>
+          <a:prstGeom prst="rect">
+            <a:avLst/>
+          </a:prstGeom>
+          <a:noFill/>
+        </p:spPr>
+        <p:txBody>
+          <a:bodyPr wrap="square">
+            <a:spAutoFit/>
+          </a:bodyPr>
+          <a:lstStyle/>
+          <a:p>
+            <a:pPr algn="l">
+              <a:defRPr sz="1200" b="1">
+                <a:solidFill>
+                  <a:srgbClr val="2F5496"/>
+                </a:solidFill>
+              </a:defRPr>
+            </a:pPr>
+            <a:r>
+              <a:t>设计稿</a:t>
+            </a:r>
+          </a:p>
+        </p:txBody>
+      </p:sp>
+      <p:sp>
+        <p:nvSpPr>
+          <p:cNvPr id="10" name="Rounded Rectangle 9"/>
+          <p:cNvSpPr/>
+          <p:nvPr/>
+        </p:nvSpPr>
+        <p:spPr>
+          <a:xfrm>
+            <a:off x="3840480" y="1371600"/>
+            <a:ext cx="7863840" cy="475488"/>
+          </a:xfrm>
+          <a:prstGeom prst="roundRect">
+            <a:avLst/>
+          </a:prstGeom>
+          <a:solidFill>
+            <a:srgbClr val="EEF2FF"/>
+          </a:solidFill>
+          <a:ln w="12700">
+            <a:solidFill>
+              <a:srgbClr val="D1D5DB"/>
+            </a:solidFill>
+          </a:ln>
+          <a:effectLst/>
+        </p:spPr>
+        <p:style>
+          <a:lnRef idx="1">
+            <a:schemeClr val="accent1"/>
+          </a:lnRef>
+          <a:fillRef idx="3">
+            <a:schemeClr val="accent1"/>
+          </a:fillRef>
+          <a:effectRef idx="2">
+            <a:schemeClr val="accent1"/>
+          </a:effectRef>
+          <a:fontRef idx="minor">
+            <a:schemeClr val="lt1"/>
+          </a:fontRef>
+        </p:style>
+        <p:txBody>
+          <a:bodyPr rtlCol="0" anchor="ctr"/>
+          <a:lstStyle/>
+          <a:p>
+            <a:pPr algn="ctr"/>
+          </a:p>
+        </p:txBody>
+      </p:sp>
+      <p:sp>
+        <p:nvSpPr>
+          <p:cNvPr id="11" name="TextBox 10"/>
+          <p:cNvSpPr txBox="1"/>
+          <p:nvPr/>
+        </p:nvSpPr>
+        <p:spPr>
+          <a:xfrm>
+            <a:off x="3950208" y="1463040"/>
+            <a:ext cx="7644384" cy="329184"/>
+          </a:xfrm>
+          <a:prstGeom prst="rect">
+            <a:avLst/>
+          </a:prstGeom>
+          <a:noFill/>
+        </p:spPr>
+        <p:txBody>
+          <a:bodyPr wrap="square">
+            <a:spAutoFit/>
+          </a:bodyPr>
+          <a:lstStyle/>
+          <a:p>
+            <a:pPr algn="l">
+              <a:defRPr sz="1200" b="1">
+                <a:solidFill>
+                  <a:srgbClr val="2F5496"/>
+                </a:solidFill>
+              </a:defRPr>
+            </a:pPr>
+            <a:r>
+              <a:t>实现状态（2026-10-13）</a:t>
+            </a:r>
+          </a:p>
+        </p:txBody>
+      </p:sp>
+      <p:sp>
+        <p:nvSpPr>
+          <p:cNvPr id="12" name="Rounded Rectangle 11"/>
+          <p:cNvSpPr/>
+          <p:nvPr/>
+        </p:nvSpPr>
+        <p:spPr>
+          <a:xfrm>
+            <a:off x="457200" y="1847088"/>
+            <a:ext cx="2377440" cy="475488"/>
+          </a:xfrm>
+          <a:prstGeom prst="roundRect">
+            <a:avLst/>
+          </a:prstGeom>
+          <a:solidFill>
+            <a:srgbClr val="FFFFFF"/>
+          </a:solidFill>
+          <a:ln w="12700">
+            <a:solidFill>
+              <a:srgbClr val="D1D5DB"/>
+            </a:solidFill>
+          </a:ln>
+          <a:effectLst/>
+        </p:spPr>
+        <p:style>
+          <a:lnRef idx="1">
+            <a:schemeClr val="accent1"/>
+          </a:lnRef>
+          <a:fillRef idx="3">
+            <a:schemeClr val="accent1"/>
+          </a:fillRef>
+          <a:effectRef idx="2">
+            <a:schemeClr val="accent1"/>
+          </a:effectRef>
+          <a:fontRef idx="minor">
+            <a:schemeClr val="lt1"/>
+          </a:fontRef>
+        </p:style>
+        <p:txBody>
+          <a:bodyPr rtlCol="0" anchor="ctr"/>
+          <a:lstStyle/>
+          <a:p>
+            <a:pPr algn="ctr"/>
+          </a:p>
+        </p:txBody>
+      </p:sp>
+      <p:sp>
+        <p:nvSpPr>
+          <p:cNvPr id="13" name="TextBox 12"/>
+          <p:cNvSpPr txBox="1"/>
+          <p:nvPr/>
+        </p:nvSpPr>
+        <p:spPr>
+          <a:xfrm>
+            <a:off x="566928" y="1938528"/>
+            <a:ext cx="2157984" cy="329184"/>
+          </a:xfrm>
+          <a:prstGeom prst="rect">
+            <a:avLst/>
+          </a:prstGeom>
+          <a:noFill/>
+        </p:spPr>
+        <p:txBody>
+          <a:bodyPr wrap="square">
+            <a:spAutoFit/>
+          </a:bodyPr>
+          <a:lstStyle/>
+          <a:p>
+            <a:pPr algn="l">
+              <a:defRPr sz="1100" b="0">
+                <a:solidFill>
+                  <a:srgbClr val="1D2A3A"/>
+                </a:solidFill>
+              </a:defRPr>
+            </a:pPr>
+            <a:r>
+              <a:t>登录页</a:t>
+            </a:r>
+          </a:p>
+        </p:txBody>
+      </p:sp>
+      <p:sp>
+        <p:nvSpPr>
+          <p:cNvPr id="14" name="Rounded Rectangle 13"/>
+          <p:cNvSpPr/>
+          <p:nvPr/>
+        </p:nvSpPr>
+        <p:spPr>
+          <a:xfrm>
+            <a:off x="2834640" y="1847088"/>
+            <a:ext cx="1005840" cy="475488"/>
+          </a:xfrm>
+          <a:prstGeom prst="roundRect">
+            <a:avLst/>
+          </a:prstGeom>
+          <a:solidFill>
+            <a:srgbClr val="FFFFFF"/>
+          </a:solidFill>
+          <a:ln w="12700">
+            <a:solidFill>
+              <a:srgbClr val="D1D5DB"/>
+            </a:solidFill>
+          </a:ln>
+          <a:effectLst/>
+        </p:spPr>
+        <p:style>
+          <a:lnRef idx="1">
+            <a:schemeClr val="accent1"/>
+          </a:lnRef>
+          <a:fillRef idx="3">
+            <a:schemeClr val="accent1"/>
+          </a:fillRef>
+          <a:effectRef idx="2">
+            <a:schemeClr val="accent1"/>
+          </a:effectRef>
+          <a:fontRef idx="minor">
+            <a:schemeClr val="lt1"/>
+          </a:fontRef>
+        </p:style>
+        <p:txBody>
+          <a:bodyPr rtlCol="0" anchor="ctr"/>
+          <a:lstStyle/>
+          <a:p>
+            <a:pPr algn="ctr"/>
+          </a:p>
+        </p:txBody>
+      </p:sp>
+      <p:sp>
+        <p:nvSpPr>
+          <p:cNvPr id="15" name="TextBox 14"/>
+          <p:cNvSpPr txBox="1"/>
+          <p:nvPr/>
+        </p:nvSpPr>
+        <p:spPr>
+          <a:xfrm>
+            <a:off x="2944368" y="1938528"/>
+            <a:ext cx="786384" cy="329184"/>
+          </a:xfrm>
+          <a:prstGeom prst="rect">
+            <a:avLst/>
+          </a:prstGeom>
+          <a:noFill/>
+        </p:spPr>
+        <p:txBody>
+          <a:bodyPr wrap="square">
+            <a:spAutoFit/>
+          </a:bodyPr>
+          <a:lstStyle/>
+          <a:p>
+            <a:pPr algn="l">
+              <a:defRPr sz="1100" b="0">
+                <a:solidFill>
+                  <a:srgbClr val="1D2A3A"/>
+                </a:solidFill>
+              </a:defRPr>
+            </a:pPr>
+            <a:r>
+              <a:t>第 3 页</a:t>
+            </a:r>
+          </a:p>
+        </p:txBody>
+      </p:sp>
+      <p:sp>
+        <p:nvSpPr>
+          <p:cNvPr id="16" name="Rounded Rectangle 15"/>
+          <p:cNvSpPr/>
+          <p:nvPr/>
+        </p:nvSpPr>
+        <p:spPr>
+          <a:xfrm>
+            <a:off x="3840480" y="1847088"/>
+            <a:ext cx="7863840" cy="475488"/>
+          </a:xfrm>
+          <a:prstGeom prst="roundRect">
+            <a:avLst/>
+          </a:prstGeom>
+          <a:solidFill>
+            <a:srgbClr val="FFFFFF"/>
+          </a:solidFill>
+          <a:ln w="12700">
+            <a:solidFill>
+              <a:srgbClr val="D1D5DB"/>
+            </a:solidFill>
+          </a:ln>
+          <a:effectLst/>
+        </p:spPr>
+        <p:style>
+          <a:lnRef idx="1">
+            <a:schemeClr val="accent1"/>
+          </a:lnRef>
+          <a:fillRef idx="3">
+            <a:schemeClr val="accent1"/>
+          </a:fillRef>
+          <a:effectRef idx="2">
+            <a:schemeClr val="accent1"/>
+          </a:effectRef>
+          <a:fontRef idx="minor">
+            <a:schemeClr val="lt1"/>
+          </a:fontRef>
+        </p:style>
+        <p:txBody>
+          <a:bodyPr rtlCol="0" anchor="ctr"/>
+          <a:lstStyle/>
+          <a:p>
+            <a:pPr algn="ctr"/>
+          </a:p>
+        </p:txBody>
+      </p:sp>
+      <p:sp>
+        <p:nvSpPr>
+          <p:cNvPr id="17" name="TextBox 16"/>
+          <p:cNvSpPr txBox="1"/>
+          <p:nvPr/>
+        </p:nvSpPr>
+        <p:spPr>
+          <a:xfrm>
+            <a:off x="3950208" y="1938528"/>
+            <a:ext cx="7644384" cy="329184"/>
+          </a:xfrm>
+          <a:prstGeom prst="rect">
+            <a:avLst/>
+          </a:prstGeom>
+          <a:noFill/>
+        </p:spPr>
+        <p:txBody>
+          <a:bodyPr wrap="square">
+            <a:spAutoFit/>
+          </a:bodyPr>
+          <a:lstStyle/>
+          <a:p>
+            <a:pPr algn="l">
+              <a:defRPr sz="1100" b="0">
+                <a:solidFill>
+                  <a:srgbClr val="1D2A3A"/>
+                </a:solidFill>
+              </a:defRPr>
+            </a:pPr>
+            <a:r>
+              <a:t>✅ 已实现 web/js/auth.js（登录调 POST /api/v1/auth/login，token 存 localStorage）</a:t>
+            </a:r>
+          </a:p>
+        </p:txBody>
+      </p:sp>
+      <p:sp>
+        <p:nvSpPr>
+          <p:cNvPr id="18" name="Rounded Rectangle 17"/>
+          <p:cNvSpPr/>
+          <p:nvPr/>
+        </p:nvSpPr>
+        <p:spPr>
+          <a:xfrm>
+            <a:off x="457200" y="2322576"/>
+            <a:ext cx="2377440" cy="475488"/>
+          </a:xfrm>
+          <a:prstGeom prst="roundRect">
+            <a:avLst/>
+          </a:prstGeom>
+          <a:solidFill>
+            <a:srgbClr val="FAFBFD"/>
+          </a:solidFill>
+          <a:ln w="12700">
+            <a:solidFill>
+              <a:srgbClr val="D1D5DB"/>
+            </a:solidFill>
+          </a:ln>
+          <a:effectLst/>
+        </p:spPr>
+        <p:style>
+          <a:lnRef idx="1">
+            <a:schemeClr val="accent1"/>
+          </a:lnRef>
+          <a:fillRef idx="3">
+            <a:schemeClr val="accent1"/>
+          </a:fillRef>
+          <a:effectRef idx="2">
+            <a:schemeClr val="accent1"/>
+          </a:effectRef>
+          <a:fontRef idx="minor">
+            <a:schemeClr val="lt1"/>
+          </a:fontRef>
+        </p:style>
+        <p:txBody>
+          <a:bodyPr rtlCol="0" anchor="ctr"/>
+          <a:lstStyle/>
+          <a:p>
+            <a:pPr algn="ctr"/>
+          </a:p>
+        </p:txBody>
+      </p:sp>
+      <p:sp>
+        <p:nvSpPr>
+          <p:cNvPr id="19" name="TextBox 18"/>
+          <p:cNvSpPr txBox="1"/>
+          <p:nvPr/>
+        </p:nvSpPr>
+        <p:spPr>
+          <a:xfrm>
+            <a:off x="566928" y="2414016"/>
+            <a:ext cx="2157984" cy="329184"/>
+          </a:xfrm>
+          <a:prstGeom prst="rect">
+            <a:avLst/>
+          </a:prstGeom>
+          <a:noFill/>
+        </p:spPr>
+        <p:txBody>
+          <a:bodyPr wrap="square">
+            <a:spAutoFit/>
+          </a:bodyPr>
+          <a:lstStyle/>
+          <a:p>
+            <a:pPr algn="l">
+              <a:defRPr sz="1100" b="0">
+                <a:solidFill>
+                  <a:srgbClr val="1D2A3A"/>
+                </a:solidFill>
+              </a:defRPr>
+            </a:pPr>
+            <a:r>
+              <a:t>题目列表页</a:t>
+            </a:r>
+          </a:p>
+        </p:txBody>
+      </p:sp>
+      <p:sp>
+        <p:nvSpPr>
+          <p:cNvPr id="20" name="Rounded Rectangle 19"/>
+          <p:cNvSpPr/>
+          <p:nvPr/>
+        </p:nvSpPr>
+        <p:spPr>
+          <a:xfrm>
+            <a:off x="2834640" y="2322576"/>
+            <a:ext cx="1005840" cy="475488"/>
+          </a:xfrm>
+          <a:prstGeom prst="roundRect">
+            <a:avLst/>
+          </a:prstGeom>
+          <a:solidFill>
+            <a:srgbClr val="FAFBFD"/>
+          </a:solidFill>
+          <a:ln w="12700">
+            <a:solidFill>
+              <a:srgbClr val="D1D5DB"/>
+            </a:solidFill>
+          </a:ln>
+          <a:effectLst/>
+        </p:spPr>
+        <p:style>
+          <a:lnRef idx="1">
+            <a:schemeClr val="accent1"/>
+          </a:lnRef>
+          <a:fillRef idx="3">
+            <a:schemeClr val="accent1"/>
+          </a:fillRef>
+          <a:effectRef idx="2">
+            <a:schemeClr val="accent1"/>
+          </a:effectRef>
+          <a:fontRef idx="minor">
+            <a:schemeClr val="lt1"/>
+          </a:fontRef>
+        </p:style>
+        <p:txBody>
+          <a:bodyPr rtlCol="0" anchor="ctr"/>
+          <a:lstStyle/>
+          <a:p>
+            <a:pPr algn="ctr"/>
+          </a:p>
+        </p:txBody>
+      </p:sp>
+      <p:sp>
+        <p:nvSpPr>
+          <p:cNvPr id="21" name="TextBox 20"/>
+          <p:cNvSpPr txBox="1"/>
+          <p:nvPr/>
+        </p:nvSpPr>
+        <p:spPr>
+          <a:xfrm>
+            <a:off x="2944368" y="2414016"/>
+            <a:ext cx="786384" cy="329184"/>
+          </a:xfrm>
+          <a:prstGeom prst="rect">
+            <a:avLst/>
+          </a:prstGeom>
+          <a:noFill/>
+        </p:spPr>
+        <p:txBody>
+          <a:bodyPr wrap="square">
+            <a:spAutoFit/>
+          </a:bodyPr>
+          <a:lstStyle/>
+          <a:p>
+            <a:pPr algn="l">
+              <a:defRPr sz="1100" b="0">
+                <a:solidFill>
+                  <a:srgbClr val="1D2A3A"/>
+                </a:solidFill>
+              </a:defRPr>
+            </a:pPr>
+            <a:r>
+              <a:t>第 5 页</a:t>
+            </a:r>
+          </a:p>
+        </p:txBody>
+      </p:sp>
+      <p:sp>
+        <p:nvSpPr>
+          <p:cNvPr id="22" name="Rounded Rectangle 21"/>
+          <p:cNvSpPr/>
+          <p:nvPr/>
+        </p:nvSpPr>
+        <p:spPr>
+          <a:xfrm>
+            <a:off x="3840480" y="2322576"/>
+            <a:ext cx="7863840" cy="475488"/>
+          </a:xfrm>
+          <a:prstGeom prst="roundRect">
+            <a:avLst/>
+          </a:prstGeom>
+          <a:solidFill>
+            <a:srgbClr val="FAFBFD"/>
+          </a:solidFill>
+          <a:ln w="12700">
+            <a:solidFill>
+              <a:srgbClr val="D1D5DB"/>
+            </a:solidFill>
+          </a:ln>
+          <a:effectLst/>
+        </p:spPr>
+        <p:style>
+          <a:lnRef idx="1">
+            <a:schemeClr val="accent1"/>
+          </a:lnRef>
+          <a:fillRef idx="3">
+            <a:schemeClr val="accent1"/>
+          </a:fillRef>
+          <a:effectRef idx="2">
+            <a:schemeClr val="accent1"/>
+          </a:effectRef>
+          <a:fontRef idx="minor">
+            <a:schemeClr val="lt1"/>
+          </a:fontRef>
+        </p:style>
+        <p:txBody>
+          <a:bodyPr rtlCol="0" anchor="ctr"/>
+          <a:lstStyle/>
+          <a:p>
+            <a:pPr algn="ctr"/>
+          </a:p>
+        </p:txBody>
+      </p:sp>
+      <p:sp>
+        <p:nvSpPr>
+          <p:cNvPr id="23" name="TextBox 22"/>
+          <p:cNvSpPr txBox="1"/>
+          <p:nvPr/>
+        </p:nvSpPr>
+        <p:spPr>
+          <a:xfrm>
+            <a:off x="3950208" y="2414016"/>
+            <a:ext cx="7644384" cy="329184"/>
+          </a:xfrm>
+          <a:prstGeom prst="rect">
+            <a:avLst/>
+          </a:prstGeom>
+          <a:noFill/>
+        </p:spPr>
+        <p:txBody>
+          <a:bodyPr wrap="square">
+            <a:spAutoFit/>
+          </a:bodyPr>
+          <a:lstStyle/>
+          <a:p>
+            <a:pPr algn="l">
+              <a:defRPr sz="1100" b="0">
+                <a:solidFill>
+                  <a:srgbClr val="1D2A3A"/>
+                </a:solidFill>
+              </a:defRPr>
+            </a:pPr>
+            <a:r>
+              <a:t>✅ 已实现 web/js/questions.js（GET /api/v1/questions，按返回 id 渲染，5 道固定题）</a:t>
+            </a:r>
+          </a:p>
+        </p:txBody>
+      </p:sp>
+      <p:sp>
+        <p:nvSpPr>
+          <p:cNvPr id="24" name="Rounded Rectangle 23"/>
+          <p:cNvSpPr/>
+          <p:nvPr/>
+        </p:nvSpPr>
+        <p:spPr>
+          <a:xfrm>
+            <a:off x="457200" y="2798064"/>
+            <a:ext cx="2377440" cy="475488"/>
+          </a:xfrm>
+          <a:prstGeom prst="roundRect">
+            <a:avLst/>
+          </a:prstGeom>
+          <a:solidFill>
+            <a:srgbClr val="FFFFFF"/>
+          </a:solidFill>
+          <a:ln w="12700">
+            <a:solidFill>
+              <a:srgbClr val="D1D5DB"/>
+            </a:solidFill>
+          </a:ln>
+          <a:effectLst/>
+        </p:spPr>
+        <p:style>
+          <a:lnRef idx="1">
+            <a:schemeClr val="accent1"/>
+          </a:lnRef>
+          <a:fillRef idx="3">
+            <a:schemeClr val="accent1"/>
+          </a:fillRef>
+          <a:effectRef idx="2">
+            <a:schemeClr val="accent1"/>
+          </a:effectRef>
+          <a:fontRef idx="minor">
+            <a:schemeClr val="lt1"/>
+          </a:fontRef>
+        </p:style>
+        <p:txBody>
+          <a:bodyPr rtlCol="0" anchor="ctr"/>
+          <a:lstStyle/>
+          <a:p>
+            <a:pPr algn="ctr"/>
+          </a:p>
+        </p:txBody>
+      </p:sp>
+      <p:sp>
+        <p:nvSpPr>
+          <p:cNvPr id="25" name="TextBox 24"/>
+          <p:cNvSpPr txBox="1"/>
+          <p:nvPr/>
+        </p:nvSpPr>
+        <p:spPr>
+          <a:xfrm>
+            <a:off x="566928" y="2889504"/>
+            <a:ext cx="2157984" cy="329184"/>
+          </a:xfrm>
+          <a:prstGeom prst="rect">
+            <a:avLst/>
+          </a:prstGeom>
+          <a:noFill/>
+        </p:spPr>
+        <p:txBody>
+          <a:bodyPr wrap="square">
+            <a:spAutoFit/>
+          </a:bodyPr>
+          <a:lstStyle/>
+          <a:p>
+            <a:pPr algn="l">
+              <a:defRPr sz="1100" b="0">
+                <a:solidFill>
+                  <a:srgbClr val="1D2A3A"/>
+                </a:solidFill>
+              </a:defRPr>
+            </a:pPr>
+            <a:r>
+              <a:t>题目详情 + AI 对话页</a:t>
+            </a:r>
+          </a:p>
+        </p:txBody>
+      </p:sp>
+      <p:sp>
+        <p:nvSpPr>
+          <p:cNvPr id="26" name="Rounded Rectangle 25"/>
+          <p:cNvSpPr/>
+          <p:nvPr/>
+        </p:nvSpPr>
+        <p:spPr>
+          <a:xfrm>
+            <a:off x="2834640" y="2798064"/>
+            <a:ext cx="1005840" cy="475488"/>
+          </a:xfrm>
+          <a:prstGeom prst="roundRect">
+            <a:avLst/>
+          </a:prstGeom>
+          <a:solidFill>
+            <a:srgbClr val="FFFFFF"/>
+          </a:solidFill>
+          <a:ln w="12700">
+            <a:solidFill>
+              <a:srgbClr val="D1D5DB"/>
+            </a:solidFill>
+          </a:ln>
+          <a:effectLst/>
+        </p:spPr>
+        <p:style>
+          <a:lnRef idx="1">
+            <a:schemeClr val="accent1"/>
+          </a:lnRef>
+          <a:fillRef idx="3">
+            <a:schemeClr val="accent1"/>
+          </a:fillRef>
+          <a:effectRef idx="2">
+            <a:schemeClr val="accent1"/>
+          </a:effectRef>
+          <a:fontRef idx="minor">
+            <a:schemeClr val="lt1"/>
+          </a:fontRef>
+        </p:style>
+        <p:txBody>
+          <a:bodyPr rtlCol="0" anchor="ctr"/>
+          <a:lstStyle/>
+          <a:p>
+            <a:pPr algn="ctr"/>
+          </a:p>
+        </p:txBody>
+      </p:sp>
+      <p:sp>
+        <p:nvSpPr>
+          <p:cNvPr id="27" name="TextBox 26"/>
+          <p:cNvSpPr txBox="1"/>
+          <p:nvPr/>
+        </p:nvSpPr>
+        <p:spPr>
+          <a:xfrm>
+            <a:off x="2944368" y="2889504"/>
+            <a:ext cx="786384" cy="329184"/>
+          </a:xfrm>
+          <a:prstGeom prst="rect">
+            <a:avLst/>
+          </a:prstGeom>
+          <a:noFill/>
+        </p:spPr>
+        <p:txBody>
+          <a:bodyPr wrap="square">
+            <a:spAutoFit/>
+          </a:bodyPr>
+          <a:lstStyle/>
+          <a:p>
+            <a:pPr algn="l">
+              <a:defRPr sz="1100" b="0">
+                <a:solidFill>
+                  <a:srgbClr val="1D2A3A"/>
+                </a:solidFill>
+              </a:defRPr>
+            </a:pPr>
+            <a:r>
+              <a:t>第 6 页</a:t>
+            </a:r>
+          </a:p>
+        </p:txBody>
+      </p:sp>
+      <p:sp>
+        <p:nvSpPr>
+          <p:cNvPr id="28" name="Rounded Rectangle 27"/>
+          <p:cNvSpPr/>
+          <p:nvPr/>
+        </p:nvSpPr>
+        <p:spPr>
+          <a:xfrm>
+            <a:off x="3840480" y="2798064"/>
+            <a:ext cx="7863840" cy="475488"/>
+          </a:xfrm>
+          <a:prstGeom prst="roundRect">
+            <a:avLst/>
+          </a:prstGeom>
+          <a:solidFill>
+            <a:srgbClr val="FFFFFF"/>
+          </a:solidFill>
+          <a:ln w="12700">
+            <a:solidFill>
+              <a:srgbClr val="D1D5DB"/>
+            </a:solidFill>
+          </a:ln>
+          <a:effectLst/>
+        </p:spPr>
+        <p:style>
+          <a:lnRef idx="1">
+            <a:schemeClr val="accent1"/>
+          </a:lnRef>
+          <a:fillRef idx="3">
+            <a:schemeClr val="accent1"/>
+          </a:fillRef>
+          <a:effectRef idx="2">
+            <a:schemeClr val="accent1"/>
+          </a:effectRef>
+          <a:fontRef idx="minor">
+            <a:schemeClr val="lt1"/>
+          </a:fontRef>
+        </p:style>
+        <p:txBody>
+          <a:bodyPr rtlCol="0" anchor="ctr"/>
+          <a:lstStyle/>
+          <a:p>
+            <a:pPr algn="ctr"/>
+          </a:p>
+        </p:txBody>
+      </p:sp>
+      <p:sp>
+        <p:nvSpPr>
+          <p:cNvPr id="29" name="TextBox 28"/>
+          <p:cNvSpPr txBox="1"/>
+          <p:nvPr/>
+        </p:nvSpPr>
+        <p:spPr>
+          <a:xfrm>
+            <a:off x="3950208" y="2889504"/>
+            <a:ext cx="7644384" cy="329184"/>
+          </a:xfrm>
+          <a:prstGeom prst="rect">
+            <a:avLst/>
+          </a:prstGeom>
+          <a:noFill/>
+        </p:spPr>
+        <p:txBody>
+          <a:bodyPr wrap="square">
+            <a:spAutoFit/>
+          </a:bodyPr>
+          <a:lstStyle/>
+          <a:p>
+            <a:pPr algn="l">
+              <a:defRPr sz="1100" b="0">
+                <a:solidFill>
+                  <a:srgbClr val="1D2A3A"/>
+                </a:solidFill>
+              </a:defRPr>
+            </a:pPr>
+            <a:r>
+              <a:t>✅ 已实现 web/js/chat.js（AI 接口未就绪时降级演示数据并标注「非真实 AI 生成」）</a:t>
+            </a:r>
+          </a:p>
+        </p:txBody>
+      </p:sp>
+      <p:sp>
+        <p:nvSpPr>
+          <p:cNvPr id="30" name="Rounded Rectangle 29"/>
+          <p:cNvSpPr/>
+          <p:nvPr/>
+        </p:nvSpPr>
+        <p:spPr>
+          <a:xfrm>
+            <a:off x="457200" y="3273552"/>
+            <a:ext cx="2377440" cy="475488"/>
+          </a:xfrm>
+          <a:prstGeom prst="roundRect">
+            <a:avLst/>
+          </a:prstGeom>
+          <a:solidFill>
+            <a:srgbClr val="FAFBFD"/>
+          </a:solidFill>
+          <a:ln w="12700">
+            <a:solidFill>
+              <a:srgbClr val="D1D5DB"/>
+            </a:solidFill>
+          </a:ln>
+          <a:effectLst/>
+        </p:spPr>
+        <p:style>
+          <a:lnRef idx="1">
+            <a:schemeClr val="accent1"/>
+          </a:lnRef>
+          <a:fillRef idx="3">
+            <a:schemeClr val="accent1"/>
+          </a:fillRef>
+          <a:effectRef idx="2">
+            <a:schemeClr val="accent1"/>
+          </a:effectRef>
+          <a:fontRef idx="minor">
+            <a:schemeClr val="lt1"/>
+          </a:fontRef>
+        </p:style>
+        <p:txBody>
+          <a:bodyPr rtlCol="0" anchor="ctr"/>
+          <a:lstStyle/>
+          <a:p>
+            <a:pPr algn="ctr"/>
+          </a:p>
+        </p:txBody>
+      </p:sp>
+      <p:sp>
+        <p:nvSpPr>
+          <p:cNvPr id="31" name="TextBox 30"/>
+          <p:cNvSpPr txBox="1"/>
+          <p:nvPr/>
+        </p:nvSpPr>
+        <p:spPr>
+          <a:xfrm>
+            <a:off x="566928" y="3364992"/>
+            <a:ext cx="2157984" cy="329184"/>
+          </a:xfrm>
+          <a:prstGeom prst="rect">
+            <a:avLst/>
+          </a:prstGeom>
+          <a:noFill/>
+        </p:spPr>
+        <p:txBody>
+          <a:bodyPr wrap="square">
+            <a:spAutoFit/>
+          </a:bodyPr>
+          <a:lstStyle/>
+          <a:p>
+            <a:pPr algn="l">
+              <a:defRPr sz="1100" b="0">
+                <a:solidFill>
+                  <a:srgbClr val="1D2A3A"/>
+                </a:solidFill>
+              </a:defRPr>
+            </a:pPr>
+            <a:r>
+              <a:t>仪表盘</a:t>
+            </a:r>
+          </a:p>
+        </p:txBody>
+      </p:sp>
+      <p:sp>
+        <p:nvSpPr>
+          <p:cNvPr id="32" name="Rounded Rectangle 31"/>
+          <p:cNvSpPr/>
+          <p:nvPr/>
+        </p:nvSpPr>
+        <p:spPr>
+          <a:xfrm>
+            <a:off x="2834640" y="3273552"/>
+            <a:ext cx="1005840" cy="475488"/>
+          </a:xfrm>
+          <a:prstGeom prst="roundRect">
+            <a:avLst/>
+          </a:prstGeom>
+          <a:solidFill>
+            <a:srgbClr val="FAFBFD"/>
+          </a:solidFill>
+          <a:ln w="12700">
+            <a:solidFill>
+              <a:srgbClr val="D1D5DB"/>
+            </a:solidFill>
+          </a:ln>
+          <a:effectLst/>
+        </p:spPr>
+        <p:style>
+          <a:lnRef idx="1">
+            <a:schemeClr val="accent1"/>
+          </a:lnRef>
+          <a:fillRef idx="3">
+            <a:schemeClr val="accent1"/>
+          </a:fillRef>
+          <a:effectRef idx="2">
+            <a:schemeClr val="accent1"/>
+          </a:effectRef>
+          <a:fontRef idx="minor">
+            <a:schemeClr val="lt1"/>
+          </a:fontRef>
+        </p:style>
+        <p:txBody>
+          <a:bodyPr rtlCol="0" anchor="ctr"/>
+          <a:lstStyle/>
+          <a:p>
+            <a:pPr algn="ctr"/>
+          </a:p>
+        </p:txBody>
+      </p:sp>
+      <p:sp>
+        <p:nvSpPr>
+          <p:cNvPr id="33" name="TextBox 32"/>
+          <p:cNvSpPr txBox="1"/>
+          <p:nvPr/>
+        </p:nvSpPr>
+        <p:spPr>
+          <a:xfrm>
+            <a:off x="2944368" y="3364992"/>
+            <a:ext cx="786384" cy="329184"/>
+          </a:xfrm>
+          <a:prstGeom prst="rect">
+            <a:avLst/>
+          </a:prstGeom>
+          <a:noFill/>
+        </p:spPr>
+        <p:txBody>
+          <a:bodyPr wrap="square">
+            <a:spAutoFit/>
+          </a:bodyPr>
+          <a:lstStyle/>
+          <a:p>
+            <a:pPr algn="l">
+              <a:defRPr sz="1100" b="0">
+                <a:solidFill>
+                  <a:srgbClr val="1D2A3A"/>
+                </a:solidFill>
+              </a:defRPr>
+            </a:pPr>
+            <a:r>
+              <a:t>第 4 页</a:t>
+            </a:r>
+          </a:p>
+        </p:txBody>
+      </p:sp>
+      <p:sp>
+        <p:nvSpPr>
+          <p:cNvPr id="34" name="Rounded Rectangle 33"/>
+          <p:cNvSpPr/>
+          <p:nvPr/>
+        </p:nvSpPr>
+        <p:spPr>
+          <a:xfrm>
+            <a:off x="3840480" y="3273552"/>
+            <a:ext cx="7863840" cy="475488"/>
+          </a:xfrm>
+          <a:prstGeom prst="roundRect">
+            <a:avLst/>
+          </a:prstGeom>
+          <a:solidFill>
+            <a:srgbClr val="FAFBFD"/>
+          </a:solidFill>
+          <a:ln w="12700">
+            <a:solidFill>
+              <a:srgbClr val="D1D5DB"/>
+            </a:solidFill>
+          </a:ln>
+          <a:effectLst/>
+        </p:spPr>
+        <p:style>
+          <a:lnRef idx="1">
+            <a:schemeClr val="accent1"/>
+          </a:lnRef>
+          <a:fillRef idx="3">
+            <a:schemeClr val="accent1"/>
+          </a:fillRef>
+          <a:effectRef idx="2">
+            <a:schemeClr val="accent1"/>
+          </a:effectRef>
+          <a:fontRef idx="minor">
+            <a:schemeClr val="lt1"/>
+          </a:fontRef>
+        </p:style>
+        <p:txBody>
+          <a:bodyPr rtlCol="0" anchor="ctr"/>
+          <a:lstStyle/>
+          <a:p>
+            <a:pPr algn="ctr"/>
+          </a:p>
+        </p:txBody>
+      </p:sp>
+      <p:sp>
+        <p:nvSpPr>
+          <p:cNvPr id="35" name="TextBox 34"/>
+          <p:cNvSpPr txBox="1"/>
+          <p:nvPr/>
+        </p:nvSpPr>
+        <p:spPr>
+          <a:xfrm>
+            <a:off x="3950208" y="3364992"/>
+            <a:ext cx="7644384" cy="329184"/>
+          </a:xfrm>
+          <a:prstGeom prst="rect">
+            <a:avLst/>
+          </a:prstGeom>
+          <a:noFill/>
+        </p:spPr>
+        <p:txBody>
+          <a:bodyPr wrap="square">
+            <a:spAutoFit/>
+          </a:bodyPr>
+          <a:lstStyle/>
+          <a:p>
+            <a:pPr algn="l">
+              <a:defRPr sz="1100" b="0">
+                <a:solidFill>
+                  <a:srgbClr val="1D2A3A"/>
+                </a:solidFill>
+              </a:defRPr>
+            </a:pPr>
+            <a:r>
+              <a:t>⬜ 规划中（Sprint 2+，依赖题目写接口与统计）</a:t>
+            </a:r>
+          </a:p>
+        </p:txBody>
+      </p:sp>
+      <p:sp>
+        <p:nvSpPr>
+          <p:cNvPr id="36" name="Rounded Rectangle 35"/>
+          <p:cNvSpPr/>
+          <p:nvPr/>
+        </p:nvSpPr>
+        <p:spPr>
+          <a:xfrm>
+            <a:off x="457200" y="3749040"/>
+            <a:ext cx="2377440" cy="475488"/>
+          </a:xfrm>
+          <a:prstGeom prst="roundRect">
+            <a:avLst/>
+          </a:prstGeom>
+          <a:solidFill>
+            <a:srgbClr val="FFFFFF"/>
+          </a:solidFill>
+          <a:ln w="12700">
+            <a:solidFill>
+              <a:srgbClr val="D1D5DB"/>
+            </a:solidFill>
+          </a:ln>
+          <a:effectLst/>
+        </p:spPr>
+        <p:style>
+          <a:lnRef idx="1">
+            <a:schemeClr val="accent1"/>
+          </a:lnRef>
+          <a:fillRef idx="3">
+            <a:schemeClr val="accent1"/>
+          </a:fillRef>
+          <a:effectRef idx="2">
+            <a:schemeClr val="accent1"/>
+          </a:effectRef>
+          <a:fontRef idx="minor">
+            <a:schemeClr val="lt1"/>
+          </a:fontRef>
+        </p:style>
+        <p:txBody>
+          <a:bodyPr rtlCol="0" anchor="ctr"/>
+          <a:lstStyle/>
+          <a:p>
+            <a:pPr algn="ctr"/>
+          </a:p>
+        </p:txBody>
+      </p:sp>
+      <p:sp>
+        <p:nvSpPr>
+          <p:cNvPr id="37" name="TextBox 36"/>
+          <p:cNvSpPr txBox="1"/>
+          <p:nvPr/>
+        </p:nvSpPr>
+        <p:spPr>
+          <a:xfrm>
+            <a:off x="566928" y="3840480"/>
+            <a:ext cx="2157984" cy="329184"/>
+          </a:xfrm>
+          <a:prstGeom prst="rect">
+            <a:avLst/>
+          </a:prstGeom>
+          <a:noFill/>
+        </p:spPr>
+        <p:txBody>
+          <a:bodyPr wrap="square">
+            <a:spAutoFit/>
+          </a:bodyPr>
+          <a:lstStyle/>
+          <a:p>
+            <a:pPr algn="l">
+              <a:defRPr sz="1100" b="0">
+                <a:solidFill>
+                  <a:srgbClr val="1D2A3A"/>
+                </a:solidFill>
+              </a:defRPr>
+            </a:pPr>
+            <a:r>
+              <a:t>试卷管理</a:t>
+            </a:r>
+          </a:p>
+        </p:txBody>
+      </p:sp>
+      <p:sp>
+        <p:nvSpPr>
+          <p:cNvPr id="38" name="Rounded Rectangle 37"/>
+          <p:cNvSpPr/>
+          <p:nvPr/>
+        </p:nvSpPr>
+        <p:spPr>
+          <a:xfrm>
+            <a:off x="2834640" y="3749040"/>
+            <a:ext cx="1005840" cy="475488"/>
+          </a:xfrm>
+          <a:prstGeom prst="roundRect">
+            <a:avLst/>
+          </a:prstGeom>
+          <a:solidFill>
+            <a:srgbClr val="FFFFFF"/>
+          </a:solidFill>
+          <a:ln w="12700">
+            <a:solidFill>
+              <a:srgbClr val="D1D5DB"/>
+            </a:solidFill>
+          </a:ln>
+          <a:effectLst/>
+        </p:spPr>
+        <p:style>
+          <a:lnRef idx="1">
+            <a:schemeClr val="accent1"/>
+          </a:lnRef>
+          <a:fillRef idx="3">
+            <a:schemeClr val="accent1"/>
+          </a:fillRef>
+          <a:effectRef idx="2">
+            <a:schemeClr val="accent1"/>
+          </a:effectRef>
+          <a:fontRef idx="minor">
+            <a:schemeClr val="lt1"/>
+          </a:fontRef>
+        </p:style>
+        <p:txBody>
+          <a:bodyPr rtlCol="0" anchor="ctr"/>
+          <a:lstStyle/>
+          <a:p>
+            <a:pPr algn="ctr"/>
+          </a:p>
+        </p:txBody>
+      </p:sp>
+      <p:sp>
+        <p:nvSpPr>
+          <p:cNvPr id="39" name="TextBox 38"/>
+          <p:cNvSpPr txBox="1"/>
+          <p:nvPr/>
+        </p:nvSpPr>
+        <p:spPr>
+          <a:xfrm>
+            <a:off x="2944368" y="3840480"/>
+            <a:ext cx="786384" cy="329184"/>
+          </a:xfrm>
+          <a:prstGeom prst="rect">
+            <a:avLst/>
+          </a:prstGeom>
+          <a:noFill/>
+        </p:spPr>
+        <p:txBody>
+          <a:bodyPr wrap="square">
+            <a:spAutoFit/>
+          </a:bodyPr>
+          <a:lstStyle/>
+          <a:p>
+            <a:pPr algn="l">
+              <a:defRPr sz="1100" b="0">
+                <a:solidFill>
+                  <a:srgbClr val="1D2A3A"/>
+                </a:solidFill>
+              </a:defRPr>
+            </a:pPr>
+            <a:r>
+              <a:t>第 7 页</a:t>
+            </a:r>
+          </a:p>
+        </p:txBody>
+      </p:sp>
+      <p:sp>
+        <p:nvSpPr>
+          <p:cNvPr id="40" name="Rounded Rectangle 39"/>
+          <p:cNvSpPr/>
+          <p:nvPr/>
+        </p:nvSpPr>
+        <p:spPr>
+          <a:xfrm>
+            <a:off x="3840480" y="3749040"/>
+            <a:ext cx="7863840" cy="475488"/>
+          </a:xfrm>
+          <a:prstGeom prst="roundRect">
+            <a:avLst/>
+          </a:prstGeom>
+          <a:solidFill>
+            <a:srgbClr val="FFFFFF"/>
+          </a:solidFill>
+          <a:ln w="12700">
+            <a:solidFill>
+              <a:srgbClr val="D1D5DB"/>
+            </a:solidFill>
+          </a:ln>
+          <a:effectLst/>
+        </p:spPr>
+        <p:style>
+          <a:lnRef idx="1">
+            <a:schemeClr val="accent1"/>
+          </a:lnRef>
+          <a:fillRef idx="3">
+            <a:schemeClr val="accent1"/>
+          </a:fillRef>
+          <a:effectRef idx="2">
+            <a:schemeClr val="accent1"/>
+          </a:effectRef>
+          <a:fontRef idx="minor">
+            <a:schemeClr val="lt1"/>
+          </a:fontRef>
+        </p:style>
+        <p:txBody>
+          <a:bodyPr rtlCol="0" anchor="ctr"/>
+          <a:lstStyle/>
+          <a:p>
+            <a:pPr algn="ctr"/>
+          </a:p>
+        </p:txBody>
+      </p:sp>
+      <p:sp>
+        <p:nvSpPr>
+          <p:cNvPr id="41" name="TextBox 40"/>
+          <p:cNvSpPr txBox="1"/>
+          <p:nvPr/>
+        </p:nvSpPr>
+        <p:spPr>
+          <a:xfrm>
+            <a:off x="3950208" y="3840480"/>
+            <a:ext cx="7644384" cy="329184"/>
+          </a:xfrm>
+          <a:prstGeom prst="rect">
+            <a:avLst/>
+          </a:prstGeom>
+          <a:noFill/>
+        </p:spPr>
+        <p:txBody>
+          <a:bodyPr wrap="square">
+            <a:spAutoFit/>
+          </a:bodyPr>
+          <a:lstStyle/>
+          <a:p>
+            <a:pPr algn="l">
+              <a:defRPr sz="1100" b="0">
+                <a:solidFill>
+                  <a:srgbClr val="1D2A3A"/>
+                </a:solidFill>
+              </a:defRPr>
+            </a:pPr>
+            <a:r>
+              <a:t>⬜ 规划中（Sprint 2，F03）</a:t>
+            </a:r>
+          </a:p>
+        </p:txBody>
+      </p:sp>
+      <p:sp>
+        <p:nvSpPr>
+          <p:cNvPr id="42" name="Rounded Rectangle 41"/>
+          <p:cNvSpPr/>
+          <p:nvPr/>
+        </p:nvSpPr>
+        <p:spPr>
+          <a:xfrm>
+            <a:off x="457200" y="4224528"/>
+            <a:ext cx="2377440" cy="475488"/>
+          </a:xfrm>
+          <a:prstGeom prst="roundRect">
+            <a:avLst/>
+          </a:prstGeom>
+          <a:solidFill>
+            <a:srgbClr val="FAFBFD"/>
+          </a:solidFill>
+          <a:ln w="12700">
+            <a:solidFill>
+              <a:srgbClr val="D1D5DB"/>
+            </a:solidFill>
+          </a:ln>
+          <a:effectLst/>
+        </p:spPr>
+        <p:style>
+          <a:lnRef idx="1">
+            <a:schemeClr val="accent1"/>
+          </a:lnRef>
+          <a:fillRef idx="3">
+            <a:schemeClr val="accent1"/>
+          </a:fillRef>
+          <a:effectRef idx="2">
+            <a:schemeClr val="accent1"/>
+          </a:effectRef>
+          <a:fontRef idx="minor">
+            <a:schemeClr val="lt1"/>
+          </a:fontRef>
+        </p:style>
+        <p:txBody>
+          <a:bodyPr rtlCol="0" anchor="ctr"/>
+          <a:lstStyle/>
+          <a:p>
+            <a:pPr algn="ctr"/>
+          </a:p>
+        </p:txBody>
+      </p:sp>
+      <p:sp>
+        <p:nvSpPr>
+          <p:cNvPr id="43" name="TextBox 42"/>
+          <p:cNvSpPr txBox="1"/>
+          <p:nvPr/>
+        </p:nvSpPr>
+        <p:spPr>
+          <a:xfrm>
+            <a:off x="566928" y="4315968"/>
+            <a:ext cx="2157984" cy="329184"/>
+          </a:xfrm>
+          <a:prstGeom prst="rect">
+            <a:avLst/>
+          </a:prstGeom>
+          <a:noFill/>
+        </p:spPr>
+        <p:txBody>
+          <a:bodyPr wrap="square">
+            <a:spAutoFit/>
+          </a:bodyPr>
+          <a:lstStyle/>
+          <a:p>
+            <a:pPr algn="l">
+              <a:defRPr sz="1100" b="0">
+                <a:solidFill>
+                  <a:srgbClr val="1D2A3A"/>
+                </a:solidFill>
+              </a:defRPr>
+            </a:pPr>
+            <a:r>
+              <a:t>管理后台</a:t>
+            </a:r>
+          </a:p>
+        </p:txBody>
+      </p:sp>
+      <p:sp>
+        <p:nvSpPr>
+          <p:cNvPr id="44" name="Rounded Rectangle 43"/>
+          <p:cNvSpPr/>
+          <p:nvPr/>
+        </p:nvSpPr>
+        <p:spPr>
+          <a:xfrm>
+            <a:off x="2834640" y="4224528"/>
+            <a:ext cx="1005840" cy="475488"/>
+          </a:xfrm>
+          <a:prstGeom prst="roundRect">
+            <a:avLst/>
+          </a:prstGeom>
+          <a:solidFill>
+            <a:srgbClr val="FAFBFD"/>
+          </a:solidFill>
+          <a:ln w="12700">
+            <a:solidFill>
+              <a:srgbClr val="D1D5DB"/>
+            </a:solidFill>
+          </a:ln>
+          <a:effectLst/>
+        </p:spPr>
+        <p:style>
+          <a:lnRef idx="1">
+            <a:schemeClr val="accent1"/>
+          </a:lnRef>
+          <a:fillRef idx="3">
+            <a:schemeClr val="accent1"/>
+          </a:fillRef>
+          <a:effectRef idx="2">
+            <a:schemeClr val="accent1"/>
+          </a:effectRef>
+          <a:fontRef idx="minor">
+            <a:schemeClr val="lt1"/>
+          </a:fontRef>
+        </p:style>
+        <p:txBody>
+          <a:bodyPr rtlCol="0" anchor="ctr"/>
+          <a:lstStyle/>
+          <a:p>
+            <a:pPr algn="ctr"/>
+          </a:p>
+        </p:txBody>
+      </p:sp>
+      <p:sp>
+        <p:nvSpPr>
+          <p:cNvPr id="45" name="TextBox 44"/>
+          <p:cNvSpPr txBox="1"/>
+          <p:nvPr/>
+        </p:nvSpPr>
+        <p:spPr>
+          <a:xfrm>
+            <a:off x="2944368" y="4315968"/>
+            <a:ext cx="786384" cy="329184"/>
+          </a:xfrm>
+          <a:prstGeom prst="rect">
+            <a:avLst/>
+          </a:prstGeom>
+          <a:noFill/>
+        </p:spPr>
+        <p:txBody>
+          <a:bodyPr wrap="square">
+            <a:spAutoFit/>
+          </a:bodyPr>
+          <a:lstStyle/>
+          <a:p>
+            <a:pPr algn="l">
+              <a:defRPr sz="1100" b="0">
+                <a:solidFill>
+                  <a:srgbClr val="1D2A3A"/>
+                </a:solidFill>
+              </a:defRPr>
+            </a:pPr>
+            <a:r>
+              <a:t>第 8 页</a:t>
+            </a:r>
+          </a:p>
+        </p:txBody>
+      </p:sp>
+      <p:sp>
+        <p:nvSpPr>
+          <p:cNvPr id="46" name="Rounded Rectangle 45"/>
+          <p:cNvSpPr/>
+          <p:nvPr/>
+        </p:nvSpPr>
+        <p:spPr>
+          <a:xfrm>
+            <a:off x="3840480" y="4224528"/>
+            <a:ext cx="7863840" cy="475488"/>
+          </a:xfrm>
+          <a:prstGeom prst="roundRect">
+            <a:avLst/>
+          </a:prstGeom>
+          <a:solidFill>
+            <a:srgbClr val="FAFBFD"/>
+          </a:solidFill>
+          <a:ln w="12700">
+            <a:solidFill>
+              <a:srgbClr val="D1D5DB"/>
+            </a:solidFill>
+          </a:ln>
+          <a:effectLst/>
+        </p:spPr>
+        <p:style>
+          <a:lnRef idx="1">
+            <a:schemeClr val="accent1"/>
+          </a:lnRef>
+          <a:fillRef idx="3">
+            <a:schemeClr val="accent1"/>
+          </a:fillRef>
+          <a:effectRef idx="2">
+            <a:schemeClr val="accent1"/>
+          </a:effectRef>
+          <a:fontRef idx="minor">
+            <a:schemeClr val="lt1"/>
+          </a:fontRef>
+        </p:style>
+        <p:txBody>
+          <a:bodyPr rtlCol="0" anchor="ctr"/>
+          <a:lstStyle/>
+          <a:p>
+            <a:pPr algn="ctr"/>
+          </a:p>
+        </p:txBody>
+      </p:sp>
+      <p:sp>
+        <p:nvSpPr>
+          <p:cNvPr id="47" name="TextBox 46"/>
+          <p:cNvSpPr txBox="1"/>
+          <p:nvPr/>
+        </p:nvSpPr>
+        <p:spPr>
+          <a:xfrm>
+            <a:off x="3950208" y="4315968"/>
+            <a:ext cx="7644384" cy="329184"/>
+          </a:xfrm>
+          <a:prstGeom prst="rect">
+            <a:avLst/>
+          </a:prstGeom>
+          <a:noFill/>
+        </p:spPr>
+        <p:txBody>
+          <a:bodyPr wrap="square">
+            <a:spAutoFit/>
+          </a:bodyPr>
+          <a:lstStyle/>
+          <a:p>
+            <a:pPr algn="l">
+              <a:defRPr sz="1100" b="0">
+                <a:solidFill>
+                  <a:srgbClr val="1D2A3A"/>
+                </a:solidFill>
+              </a:defRPr>
+            </a:pPr>
+            <a:r>
+              <a:t>⬜ 规划中（Sprint 7，F18）</a:t>
+            </a:r>
+          </a:p>
+        </p:txBody>
+      </p:sp>
+      <p:sp>
+        <p:nvSpPr>
+          <p:cNvPr id="48" name="Rounded Rectangle 47"/>
+          <p:cNvSpPr/>
+          <p:nvPr/>
+        </p:nvSpPr>
+        <p:spPr>
+          <a:xfrm>
+            <a:off x="457200" y="5029200"/>
+            <a:ext cx="11274552" cy="1005840"/>
+          </a:xfrm>
+          <a:prstGeom prst="roundRect">
+            <a:avLst/>
+          </a:prstGeom>
+          <a:solidFill>
+            <a:srgbClr val="EEF2FF"/>
+          </a:solidFill>
+          <a:ln>
+            <a:solidFill>
+              <a:srgbClr val="D1D5DB"/>
+            </a:solidFill>
+          </a:ln>
+          <a:effectLst/>
+        </p:spPr>
+        <p:style>
+          <a:lnRef idx="1">
+            <a:schemeClr val="accent1"/>
+          </a:lnRef>
+          <a:fillRef idx="3">
+            <a:schemeClr val="accent1"/>
+          </a:fillRef>
+          <a:effectRef idx="2">
+            <a:schemeClr val="accent1"/>
+          </a:effectRef>
+          <a:fontRef idx="minor">
+            <a:schemeClr val="lt1"/>
+          </a:fontRef>
+        </p:style>
+        <p:txBody>
+          <a:bodyPr rtlCol="0" anchor="ctr" wrap="square" lIns="182880" tIns="109728"/>
+          <a:lstStyle/>
+          <a:p>
+            <a:pPr algn="ctr">
+              <a:defRPr sz="1200">
+                <a:solidFill>
+                  <a:srgbClr val="1D2A3A"/>
+                </a:solidFill>
+              </a:defRPr>
+            </a:pPr>
+            <a:r>
+              <a:t>存储层变更：后端新增 kv_store 目录式键值存储层（PR #5）——namespace 映射 SQLite 表 kv_{ns}，题目数据存于 qdata namespace，接口文档 docs/kvstore.md；配套 18 断言单元测试（tests/kv/）已纳入 CI。</a:t>
+            </a:r>
+          </a:p>
+        </p:txBody>
+      </p:sp>
+    </p:spTree>
+  </p:cSld>
+  <p:clrMapOvr>
+    <a:masterClrMapping/>
+  </p:clrMapOvr>
+</p:sld>
+</file>
+
 <file path=ppt/slides/slide2.xml><?xml version="1.0" encoding="utf-8"?>
 <p:sld xmlns:a="http://schemas.openxmlformats.org/drawingml/2006/main" xmlns:p="http://schemas.openxmlformats.org/presentationml/2006/main" xmlns:r="http://schemas.openxmlformats.org/officeDocument/2006/relationships">
   <p:cSld>
@@ -3527,7 +5461,7 @@
               </a:defRPr>
             </a:pPr>
             <a:r>
-              <a:t>AI+题库智能教学平台 | UI设计稿 v1.0 | 2026.10</a:t>
+              <a:t>AI+题库智能教学平台 | UI设计稿 v1.1 | 2026.10</a:t>
             </a:r>
           </a:p>
         </p:txBody>
@@ -5316,7 +7250,7 @@
               </a:defRPr>
             </a:pPr>
             <a:r>
-              <a:t>AI+题库智能教学平台 | UI设计稿 v1.0 | 2026.10</a:t>
+              <a:t>AI+题库智能教学平台 | UI设计稿 v1.1 | 2026.10</a:t>
             </a:r>
           </a:p>
         </p:txBody>
@@ -5952,7 +7886,7 @@
               </a:defRPr>
             </a:pPr>
             <a:r>
-              <a:t>AI+题库智能教学平台 | UI设计稿 v1.0 | 2026.10</a:t>
+              <a:t>AI+题库智能教学平台 | UI设计稿 v1.1 | 2026.10</a:t>
             </a:r>
           </a:p>
         </p:txBody>
@@ -7551,7 +9485,7 @@
               </a:defRPr>
             </a:pPr>
             <a:r>
-              <a:t>AI+题库智能教学平台 | UI设计稿 v1.0 | 2026.10</a:t>
+              <a:t>AI+题库智能教学平台 | UI设计稿 v1.1 | 2026.10</a:t>
             </a:r>
           </a:p>
         </p:txBody>
@@ -11536,7 +13470,7 @@
               </a:defRPr>
             </a:pPr>
             <a:r>
-              <a:t>AI+题库智能教学平台 | UI设计稿 v1.0 | 2026.10</a:t>
+              <a:t>AI+题库智能教学平台 | UI设计稿 v1.1 | 2026.10</a:t>
             </a:r>
           </a:p>
         </p:txBody>
@@ -12337,7 +14271,7 @@
               </a:defRPr>
             </a:pPr>
             <a:r>
-              <a:t>AI+题库智能教学平台 | UI设计稿 v1.0 | 2026.10</a:t>
+              <a:t>AI+题库智能教学平台 | UI设计稿 v1.1 | 2026.10</a:t>
             </a:r>
           </a:p>
         </p:txBody>
@@ -16046,7 +17980,7 @@
               </a:defRPr>
             </a:pPr>
             <a:r>
-              <a:t>AI+题库智能教学平台 | UI设计稿 v1.0 | 2026.10</a:t>
+              <a:t>AI+题库智能教学平台 | UI设计稿 v1.1 | 2026.10</a:t>
             </a:r>
           </a:p>
         </p:txBody>
@@ -20090,7 +22024,7 @@
               </a:defRPr>
             </a:pPr>
             <a:r>
-              <a:t>AI+题库智能教学平台 | UI设计稿 v1.0 | 2026.10</a:t>
+              <a:t>AI+题库智能教学平台 | UI设计稿 v1.1 | 2026.10</a:t>
             </a:r>
           </a:p>
         </p:txBody>
